--- a/solution_presentation.pptx
+++ b/solution_presentation.pptx
@@ -4102,7 +4102,7 @@
         </p:nvSpPr>
         <p:spPr>
           <a:xfrm>
-            <a:off x="566928" y="1408176"/>
+            <a:off x="566928" y="1335024"/>
             <a:ext cx="384048" cy="384048"/>
           </a:xfrm>
           <a:prstGeom prst="ellipse">
@@ -4127,7 +4127,7 @@
         </p:nvSpPr>
         <p:spPr>
           <a:xfrm>
-            <a:off x="566928" y="1408176"/>
+            <a:off x="566928" y="1335024"/>
             <a:ext cx="384048" cy="384048"/>
           </a:xfrm>
           <a:prstGeom prst="rect">
@@ -4166,8 +4166,8 @@
         </p:nvSpPr>
         <p:spPr>
           <a:xfrm>
-            <a:off x="1133856" y="1371600"/>
-            <a:ext cx="6766560" cy="329184"/>
+            <a:off x="1133856" y="1298448"/>
+            <a:ext cx="6537960" cy="329184"/>
           </a:xfrm>
           <a:prstGeom prst="rect">
             <a:avLst/>
@@ -4205,8 +4205,8 @@
         </p:nvSpPr>
         <p:spPr>
           <a:xfrm>
-            <a:off x="1133856" y="1700784"/>
-            <a:ext cx="6766560" cy="603504"/>
+            <a:off x="1133856" y="1600200"/>
+            <a:ext cx="6537960" cy="822960"/>
           </a:xfrm>
           <a:prstGeom prst="rect">
             <a:avLst/>
@@ -4220,12 +4220,12 @@
           <a:p>
             <a:pPr indent="0" marL="0">
               <a:lnSpc>
-                <a:spcPts val="1450"/>
+                <a:spcPts val="1280"/>
               </a:lnSpc>
               <a:buNone/>
             </a:pPr>
             <a:r>
-              <a:rPr lang="en-US" sz="1150" dirty="0">
+              <a:rPr lang="en-US" sz="1000" dirty="0">
                 <a:solidFill>
                   <a:srgbClr val="A8BDD0"/>
                 </a:solidFill>
@@ -4235,7 +4235,7 @@
               </a:rPr>
               <a:t>27.52 dB vs 22.73 dB bicubic (+4.79 dB), on a held-out split never used for training</a:t>
             </a:r>
-            <a:endParaRPr lang="en-US" sz="1150" dirty="0"/>
+            <a:endParaRPr lang="en-US" sz="1000" dirty="0"/>
           </a:p>
         </p:txBody>
       </p:sp>
@@ -4247,7 +4247,7 @@
         </p:nvSpPr>
         <p:spPr>
           <a:xfrm>
-            <a:off x="566928" y="2432304"/>
+            <a:off x="566928" y="2414016"/>
             <a:ext cx="384048" cy="384048"/>
           </a:xfrm>
           <a:prstGeom prst="ellipse">
@@ -4272,7 +4272,7 @@
         </p:nvSpPr>
         <p:spPr>
           <a:xfrm>
-            <a:off x="566928" y="2432304"/>
+            <a:off x="566928" y="2414016"/>
             <a:ext cx="384048" cy="384048"/>
           </a:xfrm>
           <a:prstGeom prst="rect">
@@ -4311,8 +4311,8 @@
         </p:nvSpPr>
         <p:spPr>
           <a:xfrm>
-            <a:off x="1133856" y="2395728"/>
-            <a:ext cx="6766560" cy="329184"/>
+            <a:off x="1133856" y="2377440"/>
+            <a:ext cx="6537960" cy="329184"/>
           </a:xfrm>
           <a:prstGeom prst="rect">
             <a:avLst/>
@@ -4350,8 +4350,8 @@
         </p:nvSpPr>
         <p:spPr>
           <a:xfrm>
-            <a:off x="1133856" y="2724912"/>
-            <a:ext cx="6766560" cy="603504"/>
+            <a:off x="1133856" y="2679192"/>
+            <a:ext cx="6537960" cy="822960"/>
           </a:xfrm>
           <a:prstGeom prst="rect">
             <a:avLst/>
@@ -4365,12 +4365,12 @@
           <a:p>
             <a:pPr indent="0" marL="0">
               <a:lnSpc>
-                <a:spcPts val="1450"/>
+                <a:spcPts val="1280"/>
               </a:lnSpc>
               <a:buNone/>
             </a:pPr>
             <a:r>
-              <a:rPr lang="en-US" sz="1150" dirty="0">
+              <a:rPr lang="en-US" sz="1000" dirty="0">
                 <a:solidFill>
                   <a:srgbClr val="A8BDD0"/>
                 </a:solidFill>
@@ -4380,7 +4380,7 @@
               </a:rPr>
               <a:t>One config, one seed, committed val split, git hash inside every checkpoint, metrics computed from the saved files</a:t>
             </a:r>
-            <a:endParaRPr lang="en-US" sz="1150" dirty="0"/>
+            <a:endParaRPr lang="en-US" sz="1000" dirty="0"/>
           </a:p>
         </p:txBody>
       </p:sp>
@@ -4392,7 +4392,7 @@
         </p:nvSpPr>
         <p:spPr>
           <a:xfrm>
-            <a:off x="566928" y="3456432"/>
+            <a:off x="566928" y="3493008"/>
             <a:ext cx="384048" cy="384048"/>
           </a:xfrm>
           <a:prstGeom prst="ellipse">
@@ -4417,7 +4417,7 @@
         </p:nvSpPr>
         <p:spPr>
           <a:xfrm>
-            <a:off x="566928" y="3456432"/>
+            <a:off x="566928" y="3493008"/>
             <a:ext cx="384048" cy="384048"/>
           </a:xfrm>
           <a:prstGeom prst="rect">
@@ -4456,8 +4456,8 @@
         </p:nvSpPr>
         <p:spPr>
           <a:xfrm>
-            <a:off x="1133856" y="3419856"/>
-            <a:ext cx="6766560" cy="329184"/>
+            <a:off x="1133856" y="3456432"/>
+            <a:ext cx="6537960" cy="329184"/>
           </a:xfrm>
           <a:prstGeom prst="rect">
             <a:avLst/>
@@ -4481,7 +4481,7 @@
                 <a:ea typeface="Cambria" pitchFamily="34" charset="-122"/>
                 <a:cs typeface="Cambria" pitchFamily="34" charset="-120"/>
               </a:rPr>
-              <a:t>Honest about its limits</a:t>
+              <a:t>Training hygiene: we caught our own overfitting</a:t>
             </a:r>
             <a:endParaRPr lang="en-US" sz="1600" dirty="0"/>
           </a:p>
@@ -4495,8 +4495,8 @@
         </p:nvSpPr>
         <p:spPr>
           <a:xfrm>
-            <a:off x="1133856" y="3749040"/>
-            <a:ext cx="6766560" cy="603504"/>
+            <a:off x="1133856" y="3758184"/>
+            <a:ext cx="6537960" cy="822960"/>
           </a:xfrm>
           <a:prstGeom prst="rect">
             <a:avLst/>
@@ -4510,12 +4510,12 @@
           <a:p>
             <a:pPr indent="0" marL="0">
               <a:lnSpc>
-                <a:spcPts val="1450"/>
+                <a:spcPts val="1280"/>
               </a:lnSpc>
               <a:buNone/>
             </a:pPr>
             <a:r>
-              <a:rPr lang="en-US" sz="1150" dirty="0">
+              <a:rPr lang="en-US" sz="1000" dirty="0">
                 <a:solidFill>
                   <a:srgbClr val="A8BDD0"/>
                 </a:solidFill>
@@ -4523,9 +4523,9 @@
                 <a:ea typeface="Calibri" pitchFamily="34" charset="-122"/>
                 <a:cs typeface="Calibri" pitchFamily="34" charset="-120"/>
               </a:rPr>
-              <a:t>Stopped early at ~9.4k of 15k iterations once validation peaked and began degrading — the overfitting is reported, not hidden. One seed, one config, laptop-GPU timings.</a:t>
-            </a:r>
-            <a:endParaRPr lang="en-US" sz="1150" dirty="0"/>
+              <a:t>Validation PSNR peaked at step 4,000 of the approved 15,000 while training loss kept falling. We identified this as overfitting — 3,000 images against 4.02 M parameters, no weight decay — stopped at ~9.4k and submitted the peak checkpoint best.pt had already captured. Next step is weight decay, not more steps.</a:t>
+            </a:r>
+            <a:endParaRPr lang="en-US" sz="1000" dirty="0"/>
           </a:p>
         </p:txBody>
       </p:sp>
@@ -4576,8 +4576,8 @@
         </p:nvSpPr>
         <p:spPr>
           <a:xfrm>
-            <a:off x="7955280" y="1737360"/>
-            <a:ext cx="3749040" cy="3108960"/>
+            <a:off x="7955280" y="1719072"/>
+            <a:ext cx="3749040" cy="3291840"/>
           </a:xfrm>
           <a:prstGeom prst="rect">
             <a:avLst/>
@@ -4591,12 +4591,12 @@
           <a:p>
             <a:pPr indent="0" marL="0">
               <a:lnSpc>
-                <a:spcPts val="1400"/>
+                <a:spcPts val="1200"/>
               </a:lnSpc>
               <a:buNone/>
             </a:pPr>
             <a:r>
-              <a:rPr lang="en-US" sz="1050" dirty="0">
+              <a:rPr lang="en-US" sz="900" dirty="0">
                 <a:solidFill>
                   <a:srgbClr val="A8BDD0"/>
                 </a:solidFill>
@@ -4604,28 +4604,48 @@
                 <a:ea typeface="Calibri" pitchFamily="34" charset="-122"/>
                 <a:cs typeface="Calibri" pitchFamily="34" charset="-120"/>
               </a:rPr>
-              <a:t>No external datasets were used.</a:t>
-            </a:r>
-            <a:endParaRPr lang="en-US" sz="1050" dirty="0"/>
+              <a:t>External datasets used: NONE.</a:t>
+            </a:r>
+            <a:endParaRPr lang="en-US" sz="900" dirty="0"/>
           </a:p>
           <a:p>
             <a:pPr indent="0" marL="0">
               <a:lnSpc>
-                <a:spcPts val="1400"/>
+                <a:spcPts val="1200"/>
               </a:lnSpc>
               <a:buNone/>
             </a:pPr>
-            <a:endParaRPr lang="en-US" sz="1050" dirty="0"/>
+            <a:r>
+              <a:rPr lang="en-US" sz="900" dirty="0">
+                <a:solidFill>
+                  <a:srgbClr val="A8BDD0"/>
+                </a:solidFill>
+                <a:latin typeface="Calibri" pitchFamily="34" charset="0"/>
+                <a:ea typeface="Calibri" pitchFamily="34" charset="-122"/>
+                <a:cs typeface="Calibri" pitchFamily="34" charset="-120"/>
+              </a:rPr>
+              <a:t>Pretrained weights in the submitted model: NONE — trained from random initialization on the organizer pairs only.</a:t>
+            </a:r>
+            <a:endParaRPr lang="en-US" sz="900" dirty="0"/>
           </a:p>
           <a:p>
             <a:pPr indent="0" marL="0">
               <a:lnSpc>
-                <a:spcPts val="1400"/>
+                <a:spcPts val="1200"/>
               </a:lnSpc>
               <a:buNone/>
             </a:pPr>
-            <a:r>
-              <a:rPr lang="en-US" sz="1050" dirty="0">
+            <a:endParaRPr lang="en-US" sz="900" dirty="0"/>
+          </a:p>
+          <a:p>
+            <a:pPr indent="0" marL="0">
+              <a:lnSpc>
+                <a:spcPts val="1200"/>
+              </a:lnSpc>
+              <a:buNone/>
+            </a:pPr>
+            <a:r>
+              <a:rPr lang="en-US" sz="900" dirty="0">
                 <a:solidFill>
                   <a:srgbClr val="A8BDD0"/>
                 </a:solidFill>
@@ -4633,28 +4653,28 @@
                 <a:ea typeface="Calibri" pitchFamily="34" charset="-122"/>
                 <a:cs typeface="Calibri" pitchFamily="34" charset="-120"/>
               </a:rPr>
-              <a:t>No pretrained weights are used in the submitted model — it is trained from random initialization on the organizer pairs only.</a:t>
-            </a:r>
-            <a:endParaRPr lang="en-US" sz="1050" dirty="0"/>
+              <a:t>Evaluation only: LPIPS (pypi lpips 0.1.4, github.com/richzhang/PerceptualSimilarity, BSD-2) and its AlexNet backbone (torchvision, BSD-3). Both licences were read from the shipped LICENSE files, not from memory. Neither is imported by inference.py — verified by tracing its full import graph and re-running it with those packages blocked and sockets disabled.</a:t>
+            </a:r>
+            <a:endParaRPr lang="en-US" sz="900" dirty="0"/>
           </a:p>
           <a:p>
             <a:pPr indent="0" marL="0">
               <a:lnSpc>
-                <a:spcPts val="1400"/>
+                <a:spcPts val="1200"/>
               </a:lnSpc>
               <a:buNone/>
             </a:pPr>
-            <a:endParaRPr lang="en-US" sz="1050" dirty="0"/>
+            <a:endParaRPr lang="en-US" sz="900" dirty="0"/>
           </a:p>
           <a:p>
             <a:pPr indent="0" marL="0">
               <a:lnSpc>
-                <a:spcPts val="1400"/>
+                <a:spcPts val="1200"/>
               </a:lnSpc>
               <a:buNone/>
             </a:pPr>
             <a:r>
-              <a:rPr lang="en-US" sz="1050" dirty="0">
+              <a:rPr lang="en-US" sz="900" dirty="0">
                 <a:solidFill>
                   <a:srgbClr val="A8BDD0"/>
                 </a:solidFill>
@@ -4662,28 +4682,28 @@
                 <a:ea typeface="Calibri" pitchFamily="34" charset="-122"/>
                 <a:cs typeface="Calibri" pitchFamily="34" charset="-120"/>
               </a:rPr>
-              <a:t>LPIPS (BSD-2) and its AlexNet backbone (BSD-3) are used for evaluation only. Licences were read from the shipped LICENSE files and recorded in EXTERNAL_RESOURCES.md.</a:t>
-            </a:r>
-            <a:endParaRPr lang="en-US" sz="1050" dirty="0"/>
+              <a:t>Test_NoisyLR was used only to produce submission outputs — never trained on, never validated on.</a:t>
+            </a:r>
+            <a:endParaRPr lang="en-US" sz="900" dirty="0"/>
           </a:p>
           <a:p>
             <a:pPr indent="0" marL="0">
               <a:lnSpc>
-                <a:spcPts val="1400"/>
+                <a:spcPts val="1200"/>
               </a:lnSpc>
               <a:buNone/>
             </a:pPr>
-            <a:endParaRPr lang="en-US" sz="1050" dirty="0"/>
+            <a:endParaRPr lang="en-US" sz="900" dirty="0"/>
           </a:p>
           <a:p>
             <a:pPr indent="0" marL="0">
               <a:lnSpc>
-                <a:spcPts val="1400"/>
+                <a:spcPts val="1200"/>
               </a:lnSpc>
               <a:buNone/>
             </a:pPr>
             <a:r>
-              <a:rPr lang="en-US" sz="1050" dirty="0">
+              <a:rPr lang="en-US" sz="900" dirty="0">
                 <a:solidFill>
                   <a:srgbClr val="A8BDD0"/>
                 </a:solidFill>
@@ -4691,9 +4711,9 @@
                 <a:ea typeface="Calibri" pitchFamily="34" charset="-122"/>
                 <a:cs typeface="Calibri" pitchFamily="34" charset="-120"/>
               </a:rPr>
-              <a:t>Test_NoisyLR was used only to produce submission outputs.</a:t>
-            </a:r>
-            <a:endParaRPr lang="en-US" sz="1050" dirty="0"/>
+              <a:t>Full detail in EXTERNAL_RESOURCES.md.</a:t>
+            </a:r>
+            <a:endParaRPr lang="en-US" sz="900" dirty="0"/>
           </a:p>
         </p:txBody>
       </p:sp>
@@ -4705,7 +4725,7 @@
         </p:nvSpPr>
         <p:spPr>
           <a:xfrm>
-            <a:off x="566928" y="4626864"/>
+            <a:off x="566928" y="4791456"/>
             <a:ext cx="6949440" cy="274320"/>
           </a:xfrm>
           <a:prstGeom prst="rect">
@@ -4744,7 +4764,7 @@
         </p:nvSpPr>
         <p:spPr>
           <a:xfrm>
-            <a:off x="566928" y="4901184"/>
+            <a:off x="566928" y="5065776"/>
             <a:ext cx="6766560" cy="237744"/>
           </a:xfrm>
           <a:prstGeom prst="rect">

--- a/solution_presentation.pptx
+++ b/solution_presentation.pptx
@@ -2902,7 +2902,7 @@
                 <a:ea typeface="Cambria" pitchFamily="34" charset="-122"/>
                 <a:cs typeface="Cambria" pitchFamily="34" charset="-120"/>
               </a:rPr>
-              <a:t>171.3</a:t>
+              <a:t>172.4</a:t>
             </a:r>
             <a:endParaRPr lang="en-US" sz="3400" dirty="0"/>
           </a:p>
@@ -3014,7 +3014,7 @@
                 <a:ea typeface="Cambria" pitchFamily="34" charset="-122"/>
                 <a:cs typeface="Cambria" pitchFamily="34" charset="-120"/>
               </a:rPr>
-              <a:t>2.34 s</a:t>
+              <a:t>2.32 s</a:t>
             </a:r>
             <a:endParaRPr lang="en-US" sz="3400" dirty="0"/>
           </a:p>
@@ -3616,34 +3616,37 @@
         </p:nvSpPr>
         <p:spPr>
           <a:xfrm>
-            <a:off x="566928" y="5760720"/>
-            <a:ext cx="11055096" cy="329184"/>
-          </a:xfrm>
-          <a:prstGeom prst="rect">
-            <a:avLst/>
-          </a:prstGeom>
-          <a:noFill/>
-          <a:ln/>
-        </p:spPr>
-        <p:txBody>
-          <a:bodyPr wrap="square" lIns="0" tIns="0" rIns="0" bIns="0" rtlCol="0" anchor="ctr"/>
-          <a:lstStyle/>
-          <a:p>
-            <a:pPr indent="0" marL="0">
-              <a:buNone/>
-            </a:pPr>
-            <a:r>
-              <a:rPr lang="en-US" sz="1150" b="1" dirty="0">
-                <a:solidFill>
-                  <a:srgbClr val="065A82"/>
-                </a:solidFill>
-                <a:latin typeface="Calibri" pitchFamily="34" charset="0"/>
-                <a:ea typeface="Calibri" pitchFamily="34" charset="-122"/>
-                <a:cs typeface="Calibri" pitchFamily="34" charset="-120"/>
-              </a:rPr>
-              <a:t>Per-stage breakdown — read · preprocess · H2D · forward · D2H · write — is reported in results/runtime_report.md.</a:t>
-            </a:r>
-            <a:endParaRPr lang="en-US" sz="1150" dirty="0"/>
+            <a:off x="566928" y="5705856"/>
+            <a:ext cx="11055096" cy="731520"/>
+          </a:xfrm>
+          <a:prstGeom prst="rect">
+            <a:avLst/>
+          </a:prstGeom>
+          <a:noFill/>
+          <a:ln/>
+        </p:spPr>
+        <p:txBody>
+          <a:bodyPr wrap="square" lIns="0" tIns="0" rIns="0" bIns="0" rtlCol="0" anchor="ctr"/>
+          <a:lstStyle/>
+          <a:p>
+            <a:pPr indent="0" marL="0">
+              <a:lnSpc>
+                <a:spcPts val="1250"/>
+              </a:lnSpc>
+              <a:buNone/>
+            </a:pPr>
+            <a:r>
+              <a:rPr lang="en-US" sz="1000" dirty="0">
+                <a:solidFill>
+                  <a:srgbClr val="5B7186"/>
+                </a:solidFill>
+                <a:latin typeface="Calibri" pitchFamily="34" charset="0"/>
+                <a:ea typeface="Calibri" pitchFamily="34" charset="-122"/>
+                <a:cs typeface="Calibri" pitchFamily="34" charset="-120"/>
+              </a:rPr>
+              <a:t>Resolution paths verified beyond the released data. All 400 released test inputs are 128×128, so the 256×256 → 512×512 path was never exercised by them. It is now checked explicitly (scripts/verify_resolution_paths.py): correct ×2 shape, filenames, float32 dtype and [0,1] range at 256×256, plus 250×250 and 129×129 to force the reflect-padding path that multiples of the stride never touch — no seam, and a mixed-shape directory batches correctly. Peak VRAM: 0.124 GB at 256×256, 0.350 GB at 512×512, 1.256 GB at 256×256 batch 16.</a:t>
+            </a:r>
+            <a:endParaRPr lang="en-US" sz="1000" dirty="0"/>
           </a:p>
         </p:txBody>
       </p:sp>

--- a/solution_presentation.pptx
+++ b/solution_presentation.pptx
@@ -3872,7 +3872,7 @@
               <a:buNone/>
             </a:pPr>
             <a:r>
-              <a:rPr lang="en-US" sz="1050" b="1" i="1" dirty="0">
+              <a:rPr lang="en-US" sz="900" b="1" i="1" dirty="0">
                 <a:solidFill>
                   <a:srgbClr val="B5544A"/>
                 </a:solidFill>
@@ -3880,9 +3880,9 @@
                 <a:ea typeface="Calibri" pitchFamily="34" charset="-122"/>
                 <a:cs typeface="Calibri" pitchFamily="34" charset="-120"/>
               </a:rPr>
-              <a:t>Failure cases — lowest-PSNR validation images</a:t>
-            </a:r>
-            <a:endParaRPr lang="en-US" sz="1050" dirty="0"/>
+              <a:t>Failure cases — lowest-PSNR validation images (all three are texture-heavy: our OOD proxy group)</a:t>
+            </a:r>
+            <a:endParaRPr lang="en-US" sz="900" dirty="0"/>
           </a:p>
         </p:txBody>
       </p:sp>
@@ -3995,7 +3995,7 @@
                 <a:ea typeface="Calibri" pitchFamily="34" charset="-122"/>
                 <a:cs typeface="Calibri" pitchFamily="34" charset="-120"/>
               </a:rPr>
-              <a:t>The model over-smooths when the ground truth is itself dominated by dense, high-frequency texture that is statistically hard to distinguish from noise — 002539 (10.86 dB) and 002535 (18.16 dB) have near-noise-like GT, and 002473 is dense foliage. A fidelity objective correctly learns to suppress high-frequency content that looks like noise, which is right on average but erases genuine fine texture. Even here the model still beats bicubic on every one of these three (10.86 vs 10.22, 17.61 vs 17.21, 18.16 vs 17.30) — it never does worse, it simply cannot win much.</a:t>
+              <a:t>All three lowest-PSNR validation images fall in the texture-heavy group — the partition and the failure analysis agree independently. The model over-smooths when the ground truth is itself dominated by dense high-frequency texture: 002539 (10.86 dB) and 002535 (18.16 dB) have near-noise-like GT, 002473 is dense foliage. A fidelity objective correctly suppresses high-frequency content that looks like noise, which is right on average but erases genuine fine texture. That group averages 24.40 dB against 27.52 dB overall, and it is our honest OOD estimate. Even here the model beats bicubic on all three (10.86 vs 10.22, 17.61 vs 17.21, 18.16 vs 17.30) — it never does worse, it simply cannot win much.</a:t>
             </a:r>
             <a:endParaRPr lang="en-US" sz="950" dirty="0"/>
           </a:p>
@@ -13283,11 +13283,11 @@
         <p:spPr>
           <a:xfrm>
             <a:off x="566928" y="4370832"/>
-            <a:ext cx="5394960" cy="1572768"/>
+            <a:ext cx="3529584" cy="1737360"/>
           </a:xfrm>
           <a:prstGeom prst="roundRect">
             <a:avLst>
-              <a:gd name="adj" fmla="val 3488"/>
+              <a:gd name="adj" fmla="val 3158"/>
             </a:avLst>
           </a:prstGeom>
           <a:solidFill>
@@ -13316,24 +13316,24 @@
         </p:nvSpPr>
         <p:spPr>
           <a:xfrm>
-            <a:off x="822960" y="4517136"/>
-            <a:ext cx="4882896" cy="292608"/>
-          </a:xfrm>
-          <a:prstGeom prst="rect">
-            <a:avLst/>
-          </a:prstGeom>
-          <a:noFill/>
-          <a:ln/>
-        </p:spPr>
-        <p:txBody>
-          <a:bodyPr wrap="square" lIns="0" tIns="0" rIns="0" bIns="0" rtlCol="0" anchor="ctr"/>
-          <a:lstStyle/>
-          <a:p>
-            <a:pPr indent="0" marL="0">
-              <a:buNone/>
-            </a:pPr>
-            <a:r>
-              <a:rPr lang="en-US" sz="1350" b="1" dirty="0">
+            <a:off x="804672" y="4517136"/>
+            <a:ext cx="3054096" cy="310896"/>
+          </a:xfrm>
+          <a:prstGeom prst="rect">
+            <a:avLst/>
+          </a:prstGeom>
+          <a:noFill/>
+          <a:ln/>
+        </p:spPr>
+        <p:txBody>
+          <a:bodyPr wrap="square" lIns="0" tIns="0" rIns="0" bIns="0" rtlCol="0" anchor="ctr"/>
+          <a:lstStyle/>
+          <a:p>
+            <a:pPr indent="0" marL="0">
+              <a:buNone/>
+            </a:pPr>
+            <a:r>
+              <a:rPr lang="en-US" sz="1250" b="1" dirty="0">
                 <a:solidFill>
                   <a:srgbClr val="13202E"/>
                 </a:solidFill>
@@ -13341,9 +13341,9 @@
                 <a:ea typeface="Cambria" pitchFamily="34" charset="-122"/>
                 <a:cs typeface="Cambria" pitchFamily="34" charset="-120"/>
               </a:rPr>
-              <a:t>Metrics are computed on the saved files</a:t>
-            </a:r>
-            <a:endParaRPr lang="en-US" sz="1350" dirty="0"/>
+              <a:t>Computed on the saved files</a:t>
+            </a:r>
+            <a:endParaRPr lang="en-US" sz="1250" dirty="0"/>
           </a:p>
         </p:txBody>
       </p:sp>
@@ -13355,8 +13355,8 @@
         </p:nvSpPr>
         <p:spPr>
           <a:xfrm>
-            <a:off x="822960" y="4828032"/>
-            <a:ext cx="4882896" cy="914400"/>
+            <a:off x="804672" y="4846320"/>
+            <a:ext cx="3054096" cy="1170432"/>
           </a:xfrm>
           <a:prstGeom prst="rect">
             <a:avLst/>
@@ -13370,12 +13370,12 @@
           <a:p>
             <a:pPr indent="0" marL="0">
               <a:lnSpc>
-                <a:spcPts val="1450"/>
+                <a:spcPts val="1250"/>
               </a:lnSpc>
               <a:buNone/>
             </a:pPr>
             <a:r>
-              <a:rPr lang="en-US" sz="1100" dirty="0">
+              <a:rPr lang="en-US" sz="1000" dirty="0">
                 <a:solidFill>
                   <a:srgbClr val="5B7186"/>
                 </a:solidFill>
@@ -13385,7 +13385,7 @@
               </a:rPr>
               <a:t>scripts/evaluate.py reads the written .npy outputs back off disk rather than scoring in-memory tensors, so any dtype or range loss at save time is captured in the number we report.</a:t>
             </a:r>
-            <a:endParaRPr lang="en-US" sz="1100" dirty="0"/>
+            <a:endParaRPr lang="en-US" sz="1000" dirty="0"/>
           </a:p>
         </p:txBody>
       </p:sp>
@@ -13397,12 +13397,12 @@
         </p:nvSpPr>
         <p:spPr>
           <a:xfrm>
-            <a:off x="6236208" y="4370832"/>
-            <a:ext cx="5376672" cy="1572768"/>
+            <a:off x="4334256" y="4370832"/>
+            <a:ext cx="3529584" cy="1737360"/>
           </a:xfrm>
           <a:prstGeom prst="roundRect">
             <a:avLst>
-              <a:gd name="adj" fmla="val 3488"/>
+              <a:gd name="adj" fmla="val 3158"/>
             </a:avLst>
           </a:prstGeom>
           <a:solidFill>
@@ -13431,24 +13431,24 @@
         </p:nvSpPr>
         <p:spPr>
           <a:xfrm>
-            <a:off x="6492240" y="4517136"/>
-            <a:ext cx="4882896" cy="292608"/>
-          </a:xfrm>
-          <a:prstGeom prst="rect">
-            <a:avLst/>
-          </a:prstGeom>
-          <a:noFill/>
-          <a:ln/>
-        </p:spPr>
-        <p:txBody>
-          <a:bodyPr wrap="square" lIns="0" tIns="0" rIns="0" bIns="0" rtlCol="0" anchor="ctr"/>
-          <a:lstStyle/>
-          <a:p>
-            <a:pPr indent="0" marL="0">
-              <a:buNone/>
-            </a:pPr>
-            <a:r>
-              <a:rPr lang="en-US" sz="1350" b="1" dirty="0">
+            <a:off x="4572000" y="4517136"/>
+            <a:ext cx="3054096" cy="310896"/>
+          </a:xfrm>
+          <a:prstGeom prst="rect">
+            <a:avLst/>
+          </a:prstGeom>
+          <a:noFill/>
+          <a:ln/>
+        </p:spPr>
+        <p:txBody>
+          <a:bodyPr wrap="square" lIns="0" tIns="0" rIns="0" bIns="0" rtlCol="0" anchor="ctr"/>
+          <a:lstStyle/>
+          <a:p>
+            <a:pPr indent="0" marL="0">
+              <a:buNone/>
+            </a:pPr>
+            <a:r>
+              <a:rPr lang="en-US" sz="1250" b="1" dirty="0">
                 <a:solidFill>
                   <a:srgbClr val="13202E"/>
                 </a:solidFill>
@@ -13456,9 +13456,9 @@
                 <a:ea typeface="Cambria" pitchFamily="34" charset="-122"/>
                 <a:cs typeface="Cambria" pitchFamily="34" charset="-120"/>
               </a:rPr>
-              <a:t>Our metric code is validated, not trusted</a:t>
-            </a:r>
-            <a:endParaRPr lang="en-US" sz="1350" dirty="0"/>
+              <a:t>Metric code validated, not trusted</a:t>
+            </a:r>
+            <a:endParaRPr lang="en-US" sz="1250" dirty="0"/>
           </a:p>
         </p:txBody>
       </p:sp>
@@ -13470,8 +13470,8 @@
         </p:nvSpPr>
         <p:spPr>
           <a:xfrm>
-            <a:off x="6492240" y="4828032"/>
-            <a:ext cx="4882896" cy="914400"/>
+            <a:off x="4572000" y="4846320"/>
+            <a:ext cx="3054096" cy="1170432"/>
           </a:xfrm>
           <a:prstGeom prst="rect">
             <a:avLst/>
@@ -13485,12 +13485,12 @@
           <a:p>
             <a:pPr indent="0" marL="0">
               <a:lnSpc>
-                <a:spcPts val="1450"/>
+                <a:spcPts val="1250"/>
               </a:lnSpc>
               <a:buNone/>
             </a:pPr>
             <a:r>
-              <a:rPr lang="en-US" sz="1100" dirty="0">
+              <a:rPr lang="en-US" sz="1000" dirty="0">
                 <a:solidFill>
                   <a:srgbClr val="5B7186"/>
                 </a:solidFill>
@@ -13498,9 +13498,163 @@
                 <a:ea typeface="Calibri" pitchFamily="34" charset="-122"/>
                 <a:cs typeface="Calibri" pitchFamily="34" charset="-120"/>
               </a:rPr>
-              <a:t>PSNR and SSIM are implemented in torch, then checked against scikit-image across six noise levels. Maximum deviation: 1.6e-07 (SSIM) and 9.0e-07 (PSNR) — the numbers are not an artefact of a custom implementation.</a:t>
-            </a:r>
-            <a:endParaRPr lang="en-US" sz="1100" dirty="0"/>
+              <a:t>PSNR and SSIM are implemented in torch, then checked against scikit-image across six noise levels. Maximum deviation 1.6e-07 (SSIM) and 9.0e-07 (PSNR).</a:t>
+            </a:r>
+            <a:endParaRPr lang="en-US" sz="1000" dirty="0"/>
+          </a:p>
+        </p:txBody>
+      </p:sp>
+      <p:sp>
+        <p:nvSpPr>
+          <p:cNvPr id="37" name="Shape 35"/>
+          <p:cNvSpPr/>
+          <p:nvPr/>
+        </p:nvSpPr>
+        <p:spPr>
+          <a:xfrm>
+            <a:off x="8101584" y="4370832"/>
+            <a:ext cx="3529584" cy="1737360"/>
+          </a:xfrm>
+          <a:prstGeom prst="roundRect">
+            <a:avLst>
+              <a:gd name="adj" fmla="val 3158"/>
+            </a:avLst>
+          </a:prstGeom>
+          <a:solidFill>
+            <a:srgbClr val="FFF4E8"/>
+          </a:solidFill>
+          <a:ln w="9525">
+            <a:solidFill>
+              <a:srgbClr val="D9E2EC"/>
+            </a:solidFill>
+            <a:prstDash val="solid"/>
+          </a:ln>
+          <a:effectLst>
+            <a:outerShdw sx="100000" sy="100000" kx="0" ky="0" algn="bl" rotWithShape="0" blurRad="101600" dist="508" dir="5400000">
+              <a:srgbClr val="9AAEC0">
+                <a:alpha val="10000"/>
+              </a:srgbClr>
+            </a:outerShdw>
+          </a:effectLst>
+        </p:spPr>
+      </p:sp>
+      <p:sp>
+        <p:nvSpPr>
+          <p:cNvPr id="38" name="Text 36"/>
+          <p:cNvSpPr/>
+          <p:nvPr/>
+        </p:nvSpPr>
+        <p:spPr>
+          <a:xfrm>
+            <a:off x="8339328" y="4517136"/>
+            <a:ext cx="3054096" cy="310896"/>
+          </a:xfrm>
+          <a:prstGeom prst="rect">
+            <a:avLst/>
+          </a:prstGeom>
+          <a:noFill/>
+          <a:ln/>
+        </p:spPr>
+        <p:txBody>
+          <a:bodyPr wrap="square" lIns="0" tIns="0" rIns="0" bIns="0" rtlCol="0" anchor="ctr"/>
+          <a:lstStyle/>
+          <a:p>
+            <a:pPr indent="0" marL="0">
+              <a:buNone/>
+            </a:pPr>
+            <a:r>
+              <a:rPr lang="en-US" sz="1250" b="1" dirty="0">
+                <a:solidFill>
+                  <a:srgbClr val="9C5A1E"/>
+                </a:solidFill>
+                <a:latin typeface="Cambria" pitchFamily="34" charset="0"/>
+                <a:ea typeface="Cambria" pitchFamily="34" charset="-122"/>
+                <a:cs typeface="Cambria" pitchFamily="34" charset="-120"/>
+              </a:rPr>
+              <a:t>OOD proxy: read 24.40 dB, not 27.52</a:t>
+            </a:r>
+            <a:endParaRPr lang="en-US" sz="1250" dirty="0"/>
+          </a:p>
+        </p:txBody>
+      </p:sp>
+      <p:sp>
+        <p:nvSpPr>
+          <p:cNvPr id="39" name="Text 37"/>
+          <p:cNvSpPr/>
+          <p:nvPr/>
+        </p:nvSpPr>
+        <p:spPr>
+          <a:xfrm>
+            <a:off x="8339328" y="4846320"/>
+            <a:ext cx="3054096" cy="1170432"/>
+          </a:xfrm>
+          <a:prstGeom prst="rect">
+            <a:avLst/>
+          </a:prstGeom>
+          <a:noFill/>
+          <a:ln/>
+        </p:spPr>
+        <p:txBody>
+          <a:bodyPr wrap="square" lIns="0" tIns="0" rIns="0" bIns="0" rtlCol="0" anchor="ctr"/>
+          <a:lstStyle/>
+          <a:p>
+            <a:pPr indent="0" marL="0">
+              <a:lnSpc>
+                <a:spcPts val="1250"/>
+              </a:lnSpc>
+              <a:buNone/>
+            </a:pPr>
+            <a:r>
+              <a:rPr lang="en-US" sz="1000" dirty="0">
+                <a:solidFill>
+                  <a:srgbClr val="8A5A2B"/>
+                </a:solidFill>
+                <a:latin typeface="Calibri" pitchFamily="34" charset="0"/>
+                <a:ea typeface="Calibri" pitchFamily="34" charset="-122"/>
+                <a:cs typeface="Calibri" pitchFamily="34" charset="-120"/>
+              </a:rPr>
+              <a:t>Half the hidden test is OOD content we cannot measure directly. Partitioning the held-out split by content character gives 31.36 / 26.73 / 24.40 dB for smooth / edge-dominated / texture-heavy. We treat the weakest as our OOD expectation.</a:t>
+            </a:r>
+            <a:endParaRPr lang="en-US" sz="1000" dirty="0"/>
+          </a:p>
+        </p:txBody>
+      </p:sp>
+      <p:sp>
+        <p:nvSpPr>
+          <p:cNvPr id="40" name="Text 38"/>
+          <p:cNvSpPr/>
+          <p:nvPr/>
+        </p:nvSpPr>
+        <p:spPr>
+          <a:xfrm>
+            <a:off x="566928" y="6236208"/>
+            <a:ext cx="11055096" cy="292608"/>
+          </a:xfrm>
+          <a:prstGeom prst="rect">
+            <a:avLst/>
+          </a:prstGeom>
+          <a:noFill/>
+          <a:ln/>
+        </p:spPr>
+        <p:txBody>
+          <a:bodyPr wrap="square" lIns="0" tIns="0" rIns="0" bIns="0" rtlCol="0" anchor="ctr"/>
+          <a:lstStyle/>
+          <a:p>
+            <a:pPr indent="0" marL="0">
+              <a:buNone/>
+            </a:pPr>
+            <a:r>
+              <a:rPr lang="en-US" sz="950" i="1" dirty="0">
+                <a:solidFill>
+                  <a:srgbClr val="5B7186"/>
+                </a:solidFill>
+                <a:latin typeface="Calibri" pitchFamily="34" charset="0"/>
+                <a:ea typeface="Calibri" pitchFamily="34" charset="-122"/>
+                <a:cs typeface="Calibri" pitchFamily="34" charset="-120"/>
+              </a:rPr>
+              <a:t>Method and per-group table in results/ood_analysis.md; figure in results/figures/ood_groups.png.</a:t>
+            </a:r>
+            <a:endParaRPr lang="en-US" sz="950" dirty="0"/>
           </a:p>
         </p:txBody>
       </p:sp>

--- a/solution_presentation.pptx
+++ b/solution_presentation.pptx
@@ -3330,8 +3330,8 @@
         </p:nvSpPr>
         <p:spPr>
           <a:xfrm>
-            <a:off x="566928" y="3328416"/>
-            <a:ext cx="5486400" cy="2194560"/>
+            <a:off x="566928" y="3310128"/>
+            <a:ext cx="5394960" cy="1371600"/>
           </a:xfrm>
           <a:prstGeom prst="rect">
             <a:avLst/>
@@ -3354,7 +3354,7 @@
               <a:buChar char="•"/>
             </a:pPr>
             <a:r>
-              <a:rPr lang="en-US" sz="1150" dirty="0">
+              <a:rPr lang="en-US" sz="1050" dirty="0">
                 <a:solidFill>
                   <a:srgbClr val="13202E"/>
                 </a:solidFill>
@@ -3362,9 +3362,9 @@
                 <a:ea typeface="Calibri" pitchFamily="34" charset="-122"/>
                 <a:cs typeface="Calibri" pitchFamily="34" charset="-120"/>
               </a:rPr>
-              <a:t>Post-upsampling design — the network runs at LR resolution, so the expensive layers never see 256×256</a:t>
-            </a:r>
-            <a:endParaRPr lang="en-US" sz="1150" dirty="0"/>
+              <a:t>Post-upsampling: the network runs at LR resolution, so the expensive layers never see 256×256</a:t>
+            </a:r>
+            <a:endParaRPr lang="en-US" sz="1050" dirty="0"/>
           </a:p>
           <a:p>
             <a:pPr marL="342900" indent="-342900">
@@ -3378,7 +3378,7 @@
               <a:buChar char="•"/>
             </a:pPr>
             <a:r>
-              <a:rPr lang="en-US" sz="1150" dirty="0">
+              <a:rPr lang="en-US" sz="1050" dirty="0">
                 <a:solidFill>
                   <a:srgbClr val="13202E"/>
                 </a:solidFill>
@@ -3386,9 +3386,9 @@
                 <a:ea typeface="Calibri" pitchFamily="34" charset="-122"/>
                 <a:cs typeface="Calibri" pitchFamily="34" charset="-120"/>
               </a:rPr>
-              <a:t>Threaded output writing: single-threaded encoding is the classic hidden bottleneck in exactly this task</a:t>
-            </a:r>
-            <a:endParaRPr lang="en-US" sz="1150" dirty="0"/>
+              <a:t>Threaded output writing — the classic hidden bottleneck in this task</a:t>
+            </a:r>
+            <a:endParaRPr lang="en-US" sz="1050" dirty="0"/>
           </a:p>
           <a:p>
             <a:pPr marL="342900" indent="-342900">
@@ -3402,7 +3402,7 @@
               <a:buChar char="•"/>
             </a:pPr>
             <a:r>
-              <a:rPr lang="en-US" sz="1150" dirty="0">
+              <a:rPr lang="en-US" sz="1050" dirty="0">
                 <a:solidFill>
                   <a:srgbClr val="13202E"/>
                 </a:solidFill>
@@ -3410,57 +3410,9 @@
                 <a:ea typeface="Calibri" pitchFamily="34" charset="-122"/>
                 <a:cs typeface="Calibri" pitchFamily="34" charset="-120"/>
               </a:rPr>
-              <a:t>torch.inference_mode(), channels_last, bf16 autocast, TF32</a:t>
-            </a:r>
-            <a:endParaRPr lang="en-US" sz="1150" dirty="0"/>
-          </a:p>
-          <a:p>
-            <a:pPr marL="342900" indent="-342900">
-              <a:lnSpc>
-                <a:spcPts val="1700"/>
-              </a:lnSpc>
-              <a:spcAft>
-                <a:spcPts val="700"/>
-              </a:spcAft>
-              <a:buSzPct val="100000"/>
-              <a:buChar char="•"/>
-            </a:pPr>
-            <a:r>
-              <a:rPr lang="en-US" sz="1150" dirty="0">
-                <a:solidFill>
-                  <a:srgbClr val="13202E"/>
-                </a:solidFill>
-                <a:latin typeface="Calibri" pitchFamily="34" charset="0"/>
-                <a:ea typeface="Calibri" pitchFamily="34" charset="-122"/>
-                <a:cs typeface="Calibri" pitchFamily="34" charset="-120"/>
-              </a:rPr>
-              <a:t>Images grouped by shape so mixed resolutions batch cleanly</a:t>
-            </a:r>
-            <a:endParaRPr lang="en-US" sz="1150" dirty="0"/>
-          </a:p>
-          <a:p>
-            <a:pPr marL="342900" indent="-342900">
-              <a:lnSpc>
-                <a:spcPts val="1700"/>
-              </a:lnSpc>
-              <a:spcAft>
-                <a:spcPts val="700"/>
-              </a:spcAft>
-              <a:buSzPct val="100000"/>
-              <a:buChar char="•"/>
-            </a:pPr>
-            <a:r>
-              <a:rPr lang="en-US" sz="1150" dirty="0">
-                <a:solidFill>
-                  <a:srgbClr val="13202E"/>
-                </a:solidFill>
-                <a:latin typeface="Calibri" pitchFamily="34" charset="0"/>
-                <a:ea typeface="Calibri" pitchFamily="34" charset="-122"/>
-                <a:cs typeface="Calibri" pitchFamily="34" charset="-120"/>
-              </a:rPr>
-              <a:t>Pinned-memory reads overlap disk I/O with compute</a:t>
-            </a:r>
-            <a:endParaRPr lang="en-US" sz="1150" dirty="0"/>
+              <a:t>inference_mode, channels_last, bf16 autocast, TF32, shape-grouped batching</a:t>
+            </a:r>
+            <a:endParaRPr lang="en-US" sz="1050" dirty="0"/>
           </a:p>
         </p:txBody>
       </p:sp>
@@ -3472,12 +3424,127 @@
         </p:nvSpPr>
         <p:spPr>
           <a:xfrm>
-            <a:off x="6355080" y="3328416"/>
-            <a:ext cx="5303520" cy="2194560"/>
+            <a:off x="566928" y="4754880"/>
+            <a:ext cx="5394960" cy="1316736"/>
           </a:xfrm>
           <a:prstGeom prst="roundRect">
             <a:avLst>
-              <a:gd name="adj" fmla="val 2500"/>
+              <a:gd name="adj" fmla="val 4167"/>
+            </a:avLst>
+          </a:prstGeom>
+          <a:solidFill>
+            <a:srgbClr val="EAF2F7"/>
+          </a:solidFill>
+          <a:ln w="9525">
+            <a:solidFill>
+              <a:srgbClr val="D9E2EC"/>
+            </a:solidFill>
+            <a:prstDash val="solid"/>
+          </a:ln>
+          <a:effectLst>
+            <a:outerShdw sx="100000" sy="100000" kx="0" ky="0" algn="bl" rotWithShape="0" blurRad="101600" dist="508" dir="5400000">
+              <a:srgbClr val="9AAEC0">
+                <a:alpha val="10000"/>
+              </a:srgbClr>
+            </a:outerShdw>
+          </a:effectLst>
+        </p:spPr>
+      </p:sp>
+      <p:sp>
+        <p:nvSpPr>
+          <p:cNvPr id="19" name="Text 17"/>
+          <p:cNvSpPr/>
+          <p:nvPr/>
+        </p:nvSpPr>
+        <p:spPr>
+          <a:xfrm>
+            <a:off x="804672" y="4864608"/>
+            <a:ext cx="4937760" cy="274320"/>
+          </a:xfrm>
+          <a:prstGeom prst="rect">
+            <a:avLst/>
+          </a:prstGeom>
+          <a:noFill/>
+          <a:ln/>
+        </p:spPr>
+        <p:txBody>
+          <a:bodyPr wrap="square" lIns="0" tIns="0" rIns="0" bIns="0" rtlCol="0" anchor="ctr"/>
+          <a:lstStyle/>
+          <a:p>
+            <a:pPr indent="0" marL="0">
+              <a:buNone/>
+            </a:pPr>
+            <a:r>
+              <a:rPr lang="en-US" sz="1250" b="1" dirty="0">
+                <a:solidFill>
+                  <a:srgbClr val="065A82"/>
+                </a:solidFill>
+                <a:latin typeface="Cambria" pitchFamily="34" charset="0"/>
+                <a:ea typeface="Cambria" pitchFamily="34" charset="-122"/>
+                <a:cs typeface="Cambria" pitchFamily="34" charset="-120"/>
+              </a:rPr>
+              <a:t>Self-ensemble: measured, then declined</a:t>
+            </a:r>
+            <a:endParaRPr lang="en-US" sz="1250" dirty="0"/>
+          </a:p>
+        </p:txBody>
+      </p:sp>
+      <p:sp>
+        <p:nvSpPr>
+          <p:cNvPr id="20" name="Text 18"/>
+          <p:cNvSpPr/>
+          <p:nvPr/>
+        </p:nvSpPr>
+        <p:spPr>
+          <a:xfrm>
+            <a:off x="804672" y="5138928"/>
+            <a:ext cx="4956048" cy="859536"/>
+          </a:xfrm>
+          <a:prstGeom prst="rect">
+            <a:avLst/>
+          </a:prstGeom>
+          <a:noFill/>
+          <a:ln/>
+        </p:spPr>
+        <p:txBody>
+          <a:bodyPr wrap="square" lIns="0" tIns="0" rIns="0" bIns="0" rtlCol="0" anchor="ctr"/>
+          <a:lstStyle/>
+          <a:p>
+            <a:pPr indent="0" marL="0">
+              <a:lnSpc>
+                <a:spcPts val="1150"/>
+              </a:lnSpc>
+              <a:buNone/>
+            </a:pPr>
+            <a:r>
+              <a:rPr lang="en-US" sz="950" dirty="0">
+                <a:solidFill>
+                  <a:srgbClr val="5B7186"/>
+                </a:solidFill>
+                <a:latin typeface="Calibri" pitchFamily="34" charset="0"/>
+                <a:ea typeface="Calibri" pitchFamily="34" charset="-122"/>
+                <a:cs typeface="Calibri" pitchFamily="34" charset="-120"/>
+              </a:rPr>
+              <a:t>x8 flip/rotate averaging is implemented behind --self_ensemble and defaults OFF. It buys +0.305 dB PSNR, +0.009 SSIM, -0.012 LPIPS for 8.13x the compute (204 -&gt; 25 img/s). Quality and throughput are scored separately with undisclosed weights, so we took the option strong on both rather than trading a large certain cost for a small uncertain gain.</a:t>
+            </a:r>
+            <a:endParaRPr lang="en-US" sz="950" dirty="0"/>
+          </a:p>
+        </p:txBody>
+      </p:sp>
+      <p:sp>
+        <p:nvSpPr>
+          <p:cNvPr id="21" name="Shape 19"/>
+          <p:cNvSpPr/>
+          <p:nvPr/>
+        </p:nvSpPr>
+        <p:spPr>
+          <a:xfrm>
+            <a:off x="6355080" y="3310128"/>
+            <a:ext cx="5303520" cy="1371600"/>
+          </a:xfrm>
+          <a:prstGeom prst="roundRect">
+            <a:avLst>
+              <a:gd name="adj" fmla="val 4000"/>
             </a:avLst>
           </a:prstGeom>
           <a:solidFill>
@@ -3500,7 +3567,7 @@
       </p:sp>
       <p:sp>
         <p:nvSpPr>
-          <p:cNvPr id="19" name="Text 17"/>
+          <p:cNvPr id="22" name="Text 20"/>
           <p:cNvSpPr/>
           <p:nvPr/>
         </p:nvSpPr>
@@ -3539,14 +3606,14 @@
       </p:sp>
       <p:sp>
         <p:nvSpPr>
-          <p:cNvPr id="20" name="Text 18"/>
-          <p:cNvSpPr/>
-          <p:nvPr/>
-        </p:nvSpPr>
-        <p:spPr>
-          <a:xfrm>
-            <a:off x="6611112" y="3822192"/>
-            <a:ext cx="4791456" cy="1591056"/>
+          <p:cNvPr id="23" name="Text 21"/>
+          <p:cNvSpPr/>
+          <p:nvPr/>
+        </p:nvSpPr>
+        <p:spPr>
+          <a:xfrm>
+            <a:off x="6611112" y="3657600"/>
+            <a:ext cx="4791456" cy="932688"/>
           </a:xfrm>
           <a:prstGeom prst="rect">
             <a:avLst/>
@@ -3560,12 +3627,12 @@
           <a:p>
             <a:pPr indent="0" marL="0">
               <a:lnSpc>
-                <a:spcPts val="1400"/>
+                <a:spcPts val="1200"/>
               </a:lnSpc>
               <a:buNone/>
             </a:pPr>
             <a:r>
-              <a:rPr lang="en-US" sz="1050" dirty="0">
+              <a:rPr lang="en-US" sz="950" dirty="0">
                 <a:solidFill>
                   <a:srgbClr val="8A5A2B"/>
                 </a:solidFill>
@@ -3573,51 +3640,46 @@
                 <a:ea typeface="Calibri" pitchFamily="34" charset="-122"/>
                 <a:cs typeface="Calibri" pitchFamily="34" charset="-120"/>
               </a:rPr>
-              <a:t>All timings were measured on an RTX 4050 Laptop GPU (6 GB, sm_89), not on an H100. They should be read as relative — showing where the time goes and that no stage is pathological — not as a prediction of evaluation-hardware throughput.</a:t>
-            </a:r>
-            <a:endParaRPr lang="en-US" sz="1050" dirty="0"/>
-          </a:p>
-          <a:p>
-            <a:pPr indent="0" marL="0">
-              <a:lnSpc>
-                <a:spcPts val="1400"/>
-              </a:lnSpc>
-              <a:buNone/>
-            </a:pPr>
-            <a:endParaRPr lang="en-US" sz="1050" dirty="0"/>
-          </a:p>
-          <a:p>
-            <a:pPr indent="0" marL="0">
-              <a:lnSpc>
-                <a:spcPts val="1400"/>
-              </a:lnSpc>
-              <a:buNone/>
-            </a:pPr>
-            <a:r>
-              <a:rPr lang="en-US" sz="1050" dirty="0">
-                <a:solidFill>
-                  <a:srgbClr val="8A5A2B"/>
-                </a:solidFill>
-                <a:latin typeface="Calibri" pitchFamily="34" charset="0"/>
-                <a:ea typeface="Calibri" pitchFamily="34" charset="-122"/>
-                <a:cs typeface="Calibri" pitchFamily="34" charset="-120"/>
-              </a:rPr>
-              <a:t>Method: CUDA events with explicit synchronize, warmup passes discarded, median of repeated runs, full per-stage breakdown in results/runtime_report.md.</a:t>
-            </a:r>
-            <a:endParaRPr lang="en-US" sz="1050" dirty="0"/>
-          </a:p>
-        </p:txBody>
-      </p:sp>
-      <p:sp>
-        <p:nvSpPr>
-          <p:cNvPr id="21" name="Text 19"/>
-          <p:cNvSpPr/>
-          <p:nvPr/>
-        </p:nvSpPr>
-        <p:spPr>
-          <a:xfrm>
-            <a:off x="566928" y="5705856"/>
-            <a:ext cx="11055096" cy="731520"/>
+              <a:t>All timings are from an RTX 4050 Laptop GPU (6 GB, sm_89), not an H100 — read them as relative, not as a prediction of evaluation-hardware throughput. Method: CUDA events with explicit synchronize, warmup discarded, median of repeats; per-stage breakdown in results/runtime_report.md.</a:t>
+            </a:r>
+            <a:endParaRPr lang="en-US" sz="950" dirty="0"/>
+          </a:p>
+        </p:txBody>
+      </p:sp>
+      <p:pic>
+        <p:nvPicPr>
+          <p:cNvPr id="24" name="Image 0" descr="C:\Users\mdsha\Downloads\KLA Hackathon\kla-restoration\results\figures\self_ensemble_tradeoff.png">    </p:cNvPr>
+          <p:cNvPicPr>
+            <a:picLocks noChangeAspect="1"/>
+          </p:cNvPicPr>
+          <p:nvPr/>
+        </p:nvPicPr>
+        <p:blipFill>
+          <a:blip r:embed="rId1"/>
+          <a:stretch>
+            <a:fillRect/>
+          </a:stretch>
+        </p:blipFill>
+        <p:spPr>
+          <a:xfrm>
+            <a:off x="6355080" y="4754880"/>
+            <a:ext cx="5303520" cy="1316736"/>
+          </a:xfrm>
+          <a:prstGeom prst="rect">
+            <a:avLst/>
+          </a:prstGeom>
+        </p:spPr>
+      </p:pic>
+      <p:sp>
+        <p:nvSpPr>
+          <p:cNvPr id="25" name="Text 22"/>
+          <p:cNvSpPr/>
+          <p:nvPr/>
+        </p:nvSpPr>
+        <p:spPr>
+          <a:xfrm>
+            <a:off x="566928" y="6163056"/>
+            <a:ext cx="11055096" cy="640080"/>
           </a:xfrm>
           <a:prstGeom prst="rect">
             <a:avLst/>
@@ -3636,7 +3698,7 @@
               <a:buNone/>
             </a:pPr>
             <a:r>
-              <a:rPr lang="en-US" sz="1000" dirty="0">
+              <a:rPr lang="en-US" sz="850" dirty="0">
                 <a:solidFill>
                   <a:srgbClr val="5B7186"/>
                 </a:solidFill>
@@ -3646,7 +3708,7 @@
               </a:rPr>
               <a:t>Resolution paths verified beyond the released data. All 400 released test inputs are 128×128, so the 256×256 → 512×512 path was never exercised by them. It is now checked explicitly (scripts/verify_resolution_paths.py): correct ×2 shape, filenames, float32 dtype and [0,1] range at 256×256, plus 250×250 and 129×129 to force the reflect-padding path that multiples of the stride never touch — no seam, and a mixed-shape directory batches correctly. Peak VRAM: 0.124 GB at 256×256, 0.350 GB at 512×512, 1.256 GB at 256×256 batch 16.</a:t>
             </a:r>
-            <a:endParaRPr lang="en-US" sz="1000" dirty="0"/>
+            <a:endParaRPr lang="en-US" sz="850" dirty="0"/>
           </a:p>
         </p:txBody>
       </p:sp>
